--- a/outputs/PredictEvent_Deck.pptx
+++ b/outputs/PredictEvent_Deck.pptx
@@ -4069,7 +4069,7 @@
                 </a:solidFill>
                 <a:latin typeface="Calibri"/>
               </a:rPr>
-              <a:t>Calibrated probabilities: ECE 0.33→0.02, Brier 0.185→0.058 — '81% risk' really means ~81%.</a:t>
+              <a:t>Calibrated (isotonic): ECE 0.33→0.03; + safety floor max(model, historical) so VIP (rare) isn't under-flagged.</a:t>
             </a:r>
           </a:p>
           <a:p>

--- a/outputs/PredictEvent_Deck.pptx
+++ b/outputs/PredictEvent_Deck.pptx
@@ -4285,6 +4285,21 @@
                 </a:solidFill>
               </a:rPr>
               <a:t>• Risk×load weighting: both high-traffic AND high-risk corridors, per OR location-allocation literature.</a:t>
+            </a:r>
+          </a:p>
+          <a:p>
+            <a:pPr>
+              <a:spcAft>
+                <a:spcPts val="600"/>
+              </a:spcAft>
+            </a:pPr>
+            <a:r>
+              <a:rPr sz="1700" b="1">
+                <a:solidFill>
+                  <a:srgbClr val="1A365D"/>
+                </a:solidFill>
+              </a:rPr>
+              <a:t>• Bengaluru real-world context (researched): corridor congestion (ORR East 1.86 .. Magadi 1.13), commute peaks, monsoon, festivals, metro works, heavy-vehicle bans — all scale the deployment.</a:t>
             </a:r>
           </a:p>
           <a:p>

--- a/outputs/PredictEvent_Deck.pptx
+++ b/outputs/PredictEvent_Deck.pptx
@@ -3922,7 +3922,7 @@
                             <a:srgbClr val="444444"/>
                           </a:solidFill>
                         </a:rPr>
-                        <a:t>ROC-AUC 0.813 · recall 0.76</a:t>
+                        <a:t>ROC-AUC 0.81 · recall 0.83</a:t>
                       </a:r>
                     </a:p>
                   </a:txBody>
@@ -4033,7 +4033,7 @@
                 </a:solidFill>
                 <a:latin typeface="Calibri"/>
               </a:rPr>
-              <a:t>Operating point: recall-floor — catches ≥75% of closures (a missed closure costs BTP more).</a:t>
+              <a:t>Operating point: F2-max on forward-chained OOF preds — catches 83% of closures (a missed closure costs BTP more).</a:t>
             </a:r>
           </a:p>
           <a:p>
